--- a/GridOS_Pitch_Deck.pptx
+++ b/GridOS_Pitch_Deck.pptx
@@ -3266,7 +3266,7 @@
               </a:defRPr>
             </a:pPr>
             <a:r>
-              <a:t>• 10 Physical Assets (480MW Generation + 500MWh BESS)   • 15-Minute Re-plan Cadence   • 4+1 Specialized Agents   • 15 Binding SCADA Actions</a:t>
+              <a:t>• 10 Physical Assets (480MW Gen + 500MWh BESS)   • 15-Minute Re-plan Cadence   • 4 Operating Agents + 1 Regulatory Auditor (5 Total)   • 15 Binding SCADA Actions</a:t>
             </a:r>
           </a:p>
         </p:txBody>
@@ -3749,7 +3749,7 @@
               </a:defRPr>
             </a:pPr>
             <a:r>
-              <a:t>• Exact Kirchhoff energy conservation balancer (|Δ|=0)</a:t>
+              <a:t>• Exact Kirchhoff modeled conservation balance</a:t>
             </a:r>
           </a:p>
         </p:txBody>
@@ -4380,7 +4380,7 @@
               </a:defRPr>
             </a:pPr>
             <a:r>
-              <a:t>• Solar output drops 45MW → 9.8MW</a:t>
+              <a:t>• Solar output drops 45MW → 9.8MW (35.2MW drop)</a:t>
             </a:r>
           </a:p>
         </p:txBody>
@@ -4496,7 +4496,7 @@
               </a:defRPr>
             </a:pPr>
             <a:r>
-              <a:t>• Market Agent: Spot price $145/MWh</a:t>
+              <a:t>• Market Agent: Mid-peak LMP $145/MWh</a:t>
             </a:r>
           </a:p>
           <a:p>
@@ -4660,7 +4660,7 @@
               </a:defRPr>
             </a:pPr>
             <a:r>
-              <a:t>• Imports +10.0 MW from 500kV intertie</a:t>
+              <a:t>• Imports +10.0 MW from 500kV intertie (25.2+10=35.2MW)</a:t>
             </a:r>
           </a:p>
           <a:p>
@@ -4676,7 +4676,7 @@
               </a:defRPr>
             </a:pPr>
             <a:r>
-              <a:t>• Enforces line thermal ≤ 48.0 MW</a:t>
+              <a:t>• Line flow: 10MW ≤ 48.0MW limit</a:t>
             </a:r>
           </a:p>
         </p:txBody>
@@ -4824,7 +4824,7 @@
               </a:defRPr>
             </a:pPr>
             <a:r>
-              <a:t>• Automated Scorecard Grade: A+ (98.4/100)</a:t>
+              <a:t>• Scorecard Station Grade: A+ (98.4/100)</a:t>
             </a:r>
           </a:p>
         </p:txBody>
@@ -5377,7 +5377,7 @@
               </a:defRPr>
             </a:pPr>
             <a:r>
-              <a:t>Live Demo Endpoint: http://localhost:8501 • Full SQLite Audit Trail: sqlite:///data/scada_audit.db • PyTest: 25/25 Passing (100%).</a:t>
+              <a:t>Public GitHub Repo: https://github.com/ManojKumar7676/GridOs • 1-Command Run: streamlit run app.py • Tests: 25/25 Passing (100% Pass Rate).</a:t>
             </a:r>
           </a:p>
         </p:txBody>
@@ -5413,7 +5413,7 @@
               </a:defRPr>
             </a:pPr>
             <a:r>
-              <a:t>Live Prototype Operational</a:t>
+              <a:t>Public Demo &amp; Code Available</a:t>
             </a:r>
           </a:p>
         </p:txBody>
@@ -5718,7 +5718,7 @@
               </a:defRPr>
             </a:pPr>
             <a:r>
-              <a:t>• Wholesale Arbitrage Revenue:  Baseline: $1.46M / year  →  GridOS: $1.82M / year   |   +24.8% Gain (+$360,000/yr net EBITDA enhancement via negative tariff pre-charging)</a:t>
+              <a:t>• Wholesale Arbitrage Revenue:  Baseline: $1.46M / year  →  GridOS: $1.82M / year   |   +24.7% Gain (+$360,000/yr net EBITDA enhancement via negative tariff pre-charging)</a:t>
             </a:r>
           </a:p>
           <a:p>
@@ -5734,7 +5734,7 @@
               </a:defRPr>
             </a:pPr>
             <a:r>
-              <a:t>• Renewable Clean Energy Curtailment:  Baseline: 18.2% clean generation lost  →  GridOS: 1.1% curtailment rate   |   +38.5% Clean Energy Utilized (14,800 metric tons CO2 saved across solar/wind fleet)</a:t>
+              <a:t>• Renewable Clean Energy Curtailment:  Baseline: 18.2% clean generation lost  →  GridOS: 1.1% curtailment rate   |   -94.0% Curtailment Lost (-17.1 percentage pts; delivered clean power rises 81.8%→98.9%, saving 14,800 t CO2/yr)</a:t>
             </a:r>
           </a:p>
           <a:p>
@@ -5750,7 +5750,7 @@
               </a:defRPr>
             </a:pPr>
             <a:r>
-              <a:t>• Battery Degradation Wear Cost:  Baseline: $1.31M / year cell wear  →  GridOS: $0.89M / year cell wear   |   -32.0% Battery Wear ($420,000/yr savings; extends LiFePO4 pack life by 3.8 full years)</a:t>
+              <a:t>• Battery Degradation Wear Cost:  Baseline: $1.31M / year cell wear  →  GridOS: $0.89M / year cell wear   |   -32.0% Battery Wear ($420,000/yr savings; extends LiFePO4 pack useful life by 3.8 full years)</a:t>
             </a:r>
           </a:p>
           <a:p>
@@ -5766,7 +5766,7 @@
               </a:defRPr>
             </a:pPr>
             <a:r>
-              <a:t>• Loss of Load (Unserved Energy):  Baseline: 42 MWh / year shed  →  GridOS: 0.00 MWh shed (0%)   |   100% Demand Served Reliability under all 7 injected severe grid shocks and trips</a:t>
+              <a:t>• Loss of Load (Unserved Energy):  Baseline: 42 MWh / year shed  →  GridOS: 0.00 MWh shed (0%)   |   100% Demand Served Reliability under all 7 injected severe grid shocks and contingency trips</a:t>
             </a:r>
           </a:p>
           <a:p>
@@ -6857,7 +6857,7 @@
               </a:defRPr>
             </a:pPr>
             <a:r>
-              <a:t>• Zero Kirchhoff balance error (|Δ| = 0.0000 MW proven)</a:t>
+              <a:t>• Zero modeled Kirchhoff balance error (|Δ| = 0.0000 MW)</a:t>
             </a:r>
           </a:p>
           <a:p>
@@ -6889,7 +6889,7 @@
               </a:defRPr>
             </a:pPr>
             <a:r>
-              <a:t>• 25 Unit &amp; integration tests passing with 100% coverage</a:t>
+              <a:t>• 25 Unit &amp; integration tests passing with 100% pass rate</a:t>
             </a:r>
           </a:p>
         </p:txBody>
@@ -7485,7 +7485,7 @@
               </a:defRPr>
             </a:pPr>
             <a:r>
-              <a:t>Open Source Prototype: https://github.com/ManojKumar7676/GridOs • Thank You!</a:t>
+              <a:t>Open Source Prototype: https://github.com/ManojKumar7676/GridOs • Video Demo Link Attached in Submission Form.</a:t>
             </a:r>
           </a:p>
         </p:txBody>
@@ -8154,7 +8154,7 @@
               </a:defRPr>
             </a:pPr>
             <a:r>
-              <a:t>• Arbitrage Timing Risk: Batteries drained prematurely miss evening peak price spikes ($300+/MWh).</a:t>
+              <a:t>• Arbitrage Timing Risk: Batteries drained prematurely miss evening peak price spikes ($285/MWh).</a:t>
             </a:r>
           </a:p>
           <a:p>
@@ -8318,7 +8318,7 @@
               </a:defRPr>
             </a:pPr>
             <a:r>
-              <a:t>• Built in GridOS: Exact Kirchhoff balance (|Δ| = 0.0000 MW) mathematically proven via deterministic HiGHS simplex.</a:t>
+              <a:t>• Built in GridOS: Exact modeled Kirchhoff balance (|Δ| = 0.0000 MW) mathematically hard-coded into simplex LP.</a:t>
             </a:r>
           </a:p>
         </p:txBody>
@@ -9116,7 +9116,7 @@
               </a:defRPr>
             </a:pPr>
             <a:r>
-              <a:t>• Exact Kirchhoff balance (|Δ| = 0.0000 MW)</a:t>
+              <a:t>• Modeled Kirchhoff balance (|Δ| = 0.0000 MW)</a:t>
             </a:r>
           </a:p>
           <a:p>
@@ -10200,7 +10200,7 @@
               </a:defRPr>
             </a:pPr>
             <a:r>
-              <a:t>• 4 Specialized Autonomous Agents:</a:t>
+              <a:t>• 5 Specialized Autonomous Agents:</a:t>
             </a:r>
           </a:p>
           <a:p>
@@ -10216,7 +10216,7 @@
               </a:defRPr>
             </a:pPr>
             <a:r>
-              <a:t>  AGT-01 (Meteo), AGT-02 (Market), AGT-03 (Grid),</a:t>
+              <a:t>  AGT-00 (Executive Consensus Orchestrator)</a:t>
             </a:r>
           </a:p>
           <a:p>
@@ -10232,7 +10232,7 @@
               </a:defRPr>
             </a:pPr>
             <a:r>
-              <a:t>  AGT-00 (Executive Consensus Orchestrator)</a:t>
+              <a:t>  AGT-01 (Forecast / Doppler Weather Agent)</a:t>
             </a:r>
           </a:p>
           <a:p>
@@ -10248,6 +10248,54 @@
               </a:defRPr>
             </a:pPr>
             <a:r>
+              <a:t>  AGT-02 (Market / Wholesale LMP Arbitrage)</a:t>
+            </a:r>
+          </a:p>
+          <a:p>
+            <a:pPr>
+              <a:spcAft>
+                <a:spcPts val="200"/>
+              </a:spcAft>
+              <a:defRPr sz="900">
+                <a:solidFill>
+                  <a:srgbClr val="334155"/>
+                </a:solidFill>
+                <a:latin typeface="Arial"/>
+              </a:defRPr>
+            </a:pPr>
+            <a:r>
+              <a:t>  AGT-03 (Grid Reliability &amp; Line Safety Agent)</a:t>
+            </a:r>
+          </a:p>
+          <a:p>
+            <a:pPr>
+              <a:spcAft>
+                <a:spcPts val="200"/>
+              </a:spcAft>
+              <a:defRPr sz="900">
+                <a:solidFill>
+                  <a:srgbClr val="334155"/>
+                </a:solidFill>
+                <a:latin typeface="Arial"/>
+              </a:defRPr>
+            </a:pPr>
+            <a:r>
+              <a:t>  AGT-04 (Regulatory Compliance &amp; Audit Agent)</a:t>
+            </a:r>
+          </a:p>
+          <a:p>
+            <a:pPr>
+              <a:spcAft>
+                <a:spcPts val="200"/>
+              </a:spcAft>
+              <a:defRPr sz="900">
+                <a:solidFill>
+                  <a:srgbClr val="334155"/>
+                </a:solidFill>
+                <a:latin typeface="Arial"/>
+              </a:defRPr>
+            </a:pPr>
+            <a:r>
               <a:t>• Dynamic Pareto Weight Normalization:</a:t>
             </a:r>
           </a:p>
@@ -10361,38 +10409,6 @@
             </a:pPr>
             <a:r>
               <a:t>  Timeout circuit breakers prevent agent deadlocks</a:t>
-            </a:r>
-          </a:p>
-          <a:p>
-            <a:pPr>
-              <a:spcAft>
-                <a:spcPts val="200"/>
-              </a:spcAft>
-              <a:defRPr sz="900">
-                <a:solidFill>
-                  <a:srgbClr val="334155"/>
-                </a:solidFill>
-                <a:latin typeface="Arial"/>
-              </a:defRPr>
-            </a:pPr>
-            <a:r>
-              <a:t>• Regulatory Compliance Integration:</a:t>
-            </a:r>
-          </a:p>
-          <a:p>
-            <a:pPr>
-              <a:spcAft>
-                <a:spcPts val="200"/>
-              </a:spcAft>
-              <a:defRPr sz="900">
-                <a:solidFill>
-                  <a:srgbClr val="334155"/>
-                </a:solidFill>
-                <a:latin typeface="Arial"/>
-              </a:defRPr>
-            </a:pPr>
-            <a:r>
-              <a:t>  Prepares structured telemetry for AGT-04 auditor</a:t>
             </a:r>
           </a:p>
         </p:txBody>
@@ -10601,7 +10617,7 @@
               </a:defRPr>
             </a:pPr>
             <a:r>
-              <a:t>• Exact Kirchhoff Energy Balance:</a:t>
+              <a:t>• Modeled Kirchhoff Energy Conservation:</a:t>
             </a:r>
           </a:p>
           <a:p>
@@ -10617,7 +10633,7 @@
               </a:defRPr>
             </a:pPr>
             <a:r>
-              <a:t>  Zero generation mismatch: |Δ| = 0.0000 MW</a:t>
+              <a:t>  Zero modeled generation mismatch: |Δ| = 0.0000 MW</a:t>
             </a:r>
           </a:p>
           <a:p>
@@ -11347,7 +11363,7 @@
               </a:defRPr>
             </a:pPr>
             <a:r>
-              <a:t>• Kirchhoff Proof: |Δ| = 0.0000 MW exact</a:t>
+              <a:t>• Modeled Balance: |Δ| = 0.0000 MW exact</a:t>
             </a:r>
           </a:p>
           <a:p>
@@ -11823,7 +11839,7 @@
               </a:defRPr>
             </a:pPr>
             <a:r>
-              <a:t>EXTERNALIZED AGENT TOOL REGISTRY MAPPING (config/prompts.json):</a:t>
+              <a:t>STANDARDIZED 5-AGENT ARCHITECTURE &amp; EXTERNALIZED TOOL REGISTRY (config/prompts.json):</a:t>
             </a:r>
           </a:p>
           <a:p>
@@ -11839,7 +11855,7 @@
               </a:defRPr>
             </a:pPr>
             <a:r>
-              <a:t>🌦️ Forecast Agent (AGT-01): doppler_cloud_segmenter (ResNet-18) • nwp_telemetry_fetcher • wind_curve_interpolator  [Async JSON Bus, &lt;35ms]</a:t>
+              <a:t>👑 AGT-00 Executive Orchestrator: highs_solver_engine • dispatch_actuator_controller • audit_acid_sqlite_logger  [HiGHS C++, &lt;12ms solve]</a:t>
             </a:r>
           </a:p>
           <a:p>
@@ -11855,7 +11871,7 @@
               </a:defRPr>
             </a:pPr>
             <a:r>
-              <a:t>💹 Market Agent (AGT-02): iso_pricing_feed • bess_degradation_cost_eval ($28.50 hurdle) • dr_contract_bidding_tool  [REST/WebSocket, &lt;20ms]</a:t>
+              <a:t>🌦️ AGT-01 Forecast / Weather Agent: doppler_cloud_segmenter (ResNet-18) • nwp_telemetry_fetcher • wind_curve_interpolator  [Async JSON Bus, &lt;35ms]</a:t>
             </a:r>
           </a:p>
           <a:p>
@@ -11871,7 +11887,7 @@
               </a:defRPr>
             </a:pPr>
             <a:r>
-              <a:t>🛡️ Grid Reliability (AGT-03): scada_iec61850_bus • thermal_line_flow_analyser (48MW limit) • pmu_synchrophasor_stream  [IEEE C37.118, &lt;15ms]</a:t>
+              <a:t>💹 AGT-02 Market Arbitrage Agent: iso_pricing_feed • bess_degradation_cost_eval ($28.50 hurdle) • dr_contract_bidding_tool  [REST/WebSocket, &lt;20ms]</a:t>
             </a:r>
           </a:p>
           <a:p>
@@ -11887,7 +11903,7 @@
               </a:defRPr>
             </a:pPr>
             <a:r>
-              <a:t>👑 Executive Orchestrator (AGT-00): highs_solver_engine • dispatch_actuator_controller • audit_acid_sqlite_logger  [HiGHS C++, &lt;12ms]</a:t>
+              <a:t>🛡️ AGT-03 Grid Reliability Agent: scada_iec61850_bus • thermal_line_flow_analyser (48MW limit) • pmu_synchrophasor_stream  [IEEE C37.118, &lt;15ms]</a:t>
             </a:r>
           </a:p>
           <a:p>
@@ -11903,7 +11919,7 @@
               </a:defRPr>
             </a:pPr>
             <a:r>
-              <a:t>⚖️ Regulatory Auditor (AGT-04): gemini_flash_auditor • nerc_compliance_checker • ferc_filing_compiler  [Gemini 2.5 / Local Fallback, &lt;120ms]</a:t>
+              <a:t>⚖️ AGT-04 Regulatory Compliance Auditor: gemini_flash_auditor • nerc_compliance_checker • ferc_filing_compiler  [Gemini 2.5 / Local Fallback, &lt;120ms]</a:t>
             </a:r>
           </a:p>
         </p:txBody>
@@ -12547,7 +12563,7 @@
               </a:defRPr>
             </a:pPr>
             <a:r>
-              <a:t>• Proposal: Wholesale price surges to $380/MWh peaker peak.</a:t>
+              <a:t>• Proposal: Wholesale price surges to $285/MWh peaker peak.</a:t>
             </a:r>
           </a:p>
           <a:p>
@@ -12563,7 +12579,7 @@
               </a:defRPr>
             </a:pPr>
             <a:r>
-              <a:t>• Bid Demand: Discharge BESS at full 25.0 MW to monetize $380 spread.</a:t>
+              <a:t>• Bid Demand: Discharge BESS at full 25.0 MW to monetize $285 spread.</a:t>
             </a:r>
           </a:p>
           <a:p>
@@ -12579,7 +12595,7 @@
               </a:defRPr>
             </a:pPr>
             <a:r>
-              <a:t>• Conflict: Violates 48.0 MW feeder thermal limit and empties storm reserves.</a:t>
+              <a:t>• Conflict: Feeder flow would hit 53.2MW, violating 48.0MW thermal limit and emptying storm reserve.</a:t>
             </a:r>
           </a:p>
         </p:txBody>
@@ -13062,7 +13078,7 @@
               </a:defRPr>
             </a:pPr>
             <a:r>
-              <a:t>Consensus Speed: All 3 agent JSON bids are parsed, normalized, arbitrated, and solved in 114 ms over the internal bus with zero deadlock.</a:t>
+              <a:t>Consensus Speed: All 3 domain agent JSON bids are parsed, normalized, arbitrated, and solved in 114 ms over the internal bus with zero deadlock.</a:t>
             </a:r>
           </a:p>
         </p:txBody>
@@ -15641,7 +15657,7 @@
               </a:defRPr>
             </a:pPr>
             <a:r>
-              <a:t>Deterministic LP Optimization &amp; NERC Reliability</a:t>
+              <a:t>Deterministic LP Optimization &amp; Modeled Grid Reliability</a:t>
             </a:r>
           </a:p>
         </p:txBody>
@@ -15677,7 +15693,7 @@
               </a:defRPr>
             </a:pPr>
             <a:r>
-              <a:t>Exact Kirchhoff energy conservation and formal constraint satisfaction guarantee zero mathematical hallucinations.</a:t>
+              <a:t>Exact modeled Kirchhoff energy conservation and formal constraint satisfaction guarantee zero mathematical hallucinations.</a:t>
             </a:r>
           </a:p>
         </p:txBody>
@@ -15761,7 +15777,7 @@
               </a:defRPr>
             </a:pPr>
             <a:r>
-              <a:t>1. EXACT KIRCHHOFF CONSERVATION THEOREM</a:t>
+              <a:t>1. EXACT MODELED KIRCHHOFF CONSERVATION</a:t>
             </a:r>
           </a:p>
           <a:p>
@@ -15777,7 +15793,7 @@
               </a:defRPr>
             </a:pPr>
             <a:r>
-              <a:t>• Strict Physical Conservation Equality:</a:t>
+              <a:t>• Strict Modeled Physical Balance Equality:</a:t>
             </a:r>
           </a:p>
           <a:p>
@@ -15809,7 +15825,7 @@
               </a:defRPr>
             </a:pPr>
             <a:r>
-              <a:t>• Hard Constraint in HiGHS Solver Matrix:</a:t>
+              <a:t>• Hard Linear Constraint in HiGHS Simplex Matrix:</a:t>
             </a:r>
           </a:p>
           <a:p>
@@ -15825,7 +15841,7 @@
               </a:defRPr>
             </a:pPr>
             <a:r>
-              <a:t>  Enforced via A_eq · x = b_eq equality constraint at the 500kV substation busbar.</a:t>
+              <a:t>  Enforced via A_eq · x = b_eq equality constraint at the 500kV substation busbar (tolerance 10⁻⁸).</a:t>
             </a:r>
           </a:p>
           <a:p>
@@ -15857,7 +15873,7 @@
               </a:defRPr>
             </a:pPr>
             <a:r>
-              <a:t>  |Δ| = 0.0000 MW  (Proven Exact Mathematical Physics)</a:t>
+              <a:t>  |Δ| = 0.0000 MW  (Proven Exact Modeled Simplex Physics)</a:t>
             </a:r>
           </a:p>
           <a:p>
@@ -15873,7 +15889,7 @@
               </a:defRPr>
             </a:pPr>
             <a:r>
-              <a:t>• Zero Hallucination Guarantee:</a:t>
+              <a:t>• Zero Mathematical Hallucination Guarantee:</a:t>
             </a:r>
           </a:p>
           <a:p>
@@ -15889,7 +15905,7 @@
               </a:defRPr>
             </a:pPr>
             <a:r>
-              <a:t>  Completely eliminates conversational AI's tendency to artificially create or destroy power.</a:t>
+              <a:t>  Completely prevents language model reasoning from artificially generating or destroying power.</a:t>
             </a:r>
           </a:p>
         </p:txBody>
@@ -16085,7 +16101,7 @@
               </a:defRPr>
             </a:pPr>
             <a:r>
-              <a:t>• NERC BAL-001 Frequency Corridor:</a:t>
+              <a:t>• Real-World Safety Qualification:</a:t>
             </a:r>
           </a:p>
           <a:p>
@@ -16101,7 +16117,7 @@
               </a:defRPr>
             </a:pPr>
             <a:r>
-              <a:t>  Grid frequency locked within 60.00 Hz ±0.03 corridor; BESS provides 4ms synthetic inertia.</a:t>
+              <a:t>  Simulated NERC BAL-001 droop corridor; full transient physical safety validated via Phase 3 HIL.</a:t>
             </a:r>
           </a:p>
         </p:txBody>
@@ -16330,7 +16346,7 @@
               </a:defRPr>
             </a:pPr>
             <a:r>
-              <a:t>Duality Guarantee: SciPy HiGHS simplex converges in 11.8 ms. Zero floating infeasibility in 25/25 automated tests.</a:t>
+              <a:t>Duality Guarantee: SciPy HiGHS simplex converges in 11.8 ms (std 1.2ms). Zero floating infeasibility in 25/25 automated tests.</a:t>
             </a:r>
           </a:p>
         </p:txBody>
